--- a/assets/pptx/catalog-155.pptx
+++ b/assets/pptx/catalog-155.pptx
@@ -3285,7 +3285,7 @@
                 <a:ea typeface="Ebrima"/>
                 <a:cs typeface="Ebrima"/>
               </a:rPr>
-              <a:t>እያሳየ እየተገበረ (2x)</a:t>
+              <a:t>እያሳየ እየተገበረ 2x</a:t>
             </a:r>
           </a:p>
         </p:txBody>
@@ -3630,7 +3630,7 @@
                 <a:ea typeface="Ebrima"/>
                 <a:cs typeface="Ebrima"/>
               </a:rPr>
-              <a:t>እያሳየ እየተገበረ (2x)</a:t>
+              <a:t>እያሳየ እየተገበረ 2x</a:t>
             </a:r>
           </a:p>
         </p:txBody>
@@ -3975,7 +3975,7 @@
                 <a:ea typeface="Ebrima"/>
                 <a:cs typeface="Ebrima"/>
               </a:rPr>
-              <a:t>እያሳየ እየተገበረ (2x)</a:t>
+              <a:t>እያሳየ እየተገበረ 2x</a:t>
             </a:r>
           </a:p>
         </p:txBody>
